--- a/slides/slides_lec_01.pptx
+++ b/slides/slides_lec_01.pptx
@@ -1691,7 +1691,7 @@
         </p:nvSpPr>
         <p:spPr>
           <a:xfrm>
-            <a:off x="822960" y="1371600"/>
+            <a:off x="822960" y="1691640"/>
             <a:ext cx="566928" cy="566928"/>
           </a:xfrm>
           <a:prstGeom prst="ellipse">
@@ -1711,7 +1711,7 @@
         </p:nvSpPr>
         <p:spPr>
           <a:xfrm>
-            <a:off x="822960" y="1371600"/>
+            <a:off x="822960" y="1691640"/>
             <a:ext cx="566928" cy="566928"/>
           </a:xfrm>
           <a:prstGeom prst="rect">
@@ -1750,7 +1750,7 @@
         </p:nvSpPr>
         <p:spPr>
           <a:xfrm>
-            <a:off x="1600200" y="1335024"/>
+            <a:off x="1600200" y="1655064"/>
             <a:ext cx="9418320" cy="457200"/>
           </a:xfrm>
           <a:prstGeom prst="rect">
@@ -1789,7 +1789,7 @@
         </p:nvSpPr>
         <p:spPr>
           <a:xfrm>
-            <a:off x="1600200" y="1874520"/>
+            <a:off x="1600200" y="2194560"/>
             <a:ext cx="9418320" cy="1463040"/>
           </a:xfrm>
           <a:prstGeom prst="rect">
@@ -1831,7 +1831,7 @@
         </p:nvSpPr>
         <p:spPr>
           <a:xfrm>
-            <a:off x="822960" y="3703320"/>
+            <a:off x="822960" y="4087368"/>
             <a:ext cx="566928" cy="566928"/>
           </a:xfrm>
           <a:prstGeom prst="ellipse">
@@ -1851,7 +1851,7 @@
         </p:nvSpPr>
         <p:spPr>
           <a:xfrm>
-            <a:off x="822960" y="3703320"/>
+            <a:off x="822960" y="4087368"/>
             <a:ext cx="566928" cy="566928"/>
           </a:xfrm>
           <a:prstGeom prst="rect">
@@ -1890,7 +1890,7 @@
         </p:nvSpPr>
         <p:spPr>
           <a:xfrm>
-            <a:off x="1600200" y="3666744"/>
+            <a:off x="1600200" y="4050792"/>
             <a:ext cx="9418320" cy="457200"/>
           </a:xfrm>
           <a:prstGeom prst="rect">
@@ -1929,7 +1929,7 @@
         </p:nvSpPr>
         <p:spPr>
           <a:xfrm>
-            <a:off x="1600200" y="4206240"/>
+            <a:off x="1600200" y="4590288"/>
             <a:ext cx="9418320" cy="1463040"/>
           </a:xfrm>
           <a:prstGeom prst="rect">
@@ -2042,7 +2042,7 @@
         </p:nvSpPr>
         <p:spPr>
           <a:xfrm>
-            <a:off x="822960" y="1371600"/>
+            <a:off x="822960" y="1691640"/>
             <a:ext cx="566928" cy="566928"/>
           </a:xfrm>
           <a:prstGeom prst="ellipse">
@@ -2062,7 +2062,7 @@
         </p:nvSpPr>
         <p:spPr>
           <a:xfrm>
-            <a:off x="822960" y="1371600"/>
+            <a:off x="822960" y="1691640"/>
             <a:ext cx="566928" cy="566928"/>
           </a:xfrm>
           <a:prstGeom prst="rect">
@@ -2101,7 +2101,7 @@
         </p:nvSpPr>
         <p:spPr>
           <a:xfrm>
-            <a:off x="1600200" y="1335024"/>
+            <a:off x="1600200" y="1655064"/>
             <a:ext cx="9418320" cy="457200"/>
           </a:xfrm>
           <a:prstGeom prst="rect">
@@ -2140,7 +2140,7 @@
         </p:nvSpPr>
         <p:spPr>
           <a:xfrm>
-            <a:off x="1600200" y="1874520"/>
+            <a:off x="1600200" y="2194560"/>
             <a:ext cx="9418320" cy="1463040"/>
           </a:xfrm>
           <a:prstGeom prst="rect">
@@ -2182,7 +2182,7 @@
         </p:nvSpPr>
         <p:spPr>
           <a:xfrm>
-            <a:off x="822960" y="3703320"/>
+            <a:off x="822960" y="4087368"/>
             <a:ext cx="566928" cy="566928"/>
           </a:xfrm>
           <a:prstGeom prst="ellipse">
@@ -2202,7 +2202,7 @@
         </p:nvSpPr>
         <p:spPr>
           <a:xfrm>
-            <a:off x="822960" y="3703320"/>
+            <a:off x="822960" y="4087368"/>
             <a:ext cx="566928" cy="566928"/>
           </a:xfrm>
           <a:prstGeom prst="rect">
@@ -2241,7 +2241,7 @@
         </p:nvSpPr>
         <p:spPr>
           <a:xfrm>
-            <a:off x="1600200" y="3666744"/>
+            <a:off x="1600200" y="4050792"/>
             <a:ext cx="9418320" cy="457200"/>
           </a:xfrm>
           <a:prstGeom prst="rect">
@@ -2280,7 +2280,7 @@
         </p:nvSpPr>
         <p:spPr>
           <a:xfrm>
-            <a:off x="1600200" y="4206240"/>
+            <a:off x="1600200" y="4590288"/>
             <a:ext cx="9418320" cy="1463040"/>
           </a:xfrm>
           <a:prstGeom prst="rect">
